--- a/Reporte 080726.pptx
+++ b/Reporte 080726.pptx
@@ -5,7 +5,7 @@
     <p:sldMasterId id="2147483672" r:id="rId1"/>
   </p:sldMasterIdLst>
   <p:notesMasterIdLst>
-    <p:notesMasterId r:id="rId18"/>
+    <p:notesMasterId r:id="rId19"/>
   </p:notesMasterIdLst>
   <p:sldIdLst>
     <p:sldId id="350" r:id="rId2"/>
@@ -22,24 +22,25 @@
     <p:sldId id="369" r:id="rId13"/>
     <p:sldId id="361" r:id="rId14"/>
     <p:sldId id="371" r:id="rId15"/>
-    <p:sldId id="400" r:id="rId16"/>
-    <p:sldId id="280" r:id="rId17"/>
+    <p:sldId id="409" r:id="rId16"/>
+    <p:sldId id="400" r:id="rId17"/>
+    <p:sldId id="280" r:id="rId18"/>
   </p:sldIdLst>
   <p:sldSz cx="9144000" cy="5143500" type="screen16x9"/>
   <p:notesSz cx="6858000" cy="9144000"/>
   <p:embeddedFontLst>
     <p:embeddedFont>
       <p:font typeface="Montserrat" panose="00000500000000000000" pitchFamily="2" charset="0"/>
-      <p:regular r:id="rId19"/>
-      <p:bold r:id="rId20"/>
-      <p:italic r:id="rId21"/>
-      <p:boldItalic r:id="rId22"/>
+      <p:regular r:id="rId20"/>
+      <p:bold r:id="rId21"/>
+      <p:italic r:id="rId22"/>
+      <p:boldItalic r:id="rId23"/>
     </p:embeddedFont>
     <p:embeddedFont>
       <p:font typeface="Montserrat Black" panose="00000A00000000000000" pitchFamily="2" charset="0"/>
-      <p:bold r:id="rId23"/>
-      <p:italic r:id="rId24"/>
-      <p:boldItalic r:id="rId25"/>
+      <p:bold r:id="rId24"/>
+      <p:italic r:id="rId25"/>
+      <p:boldItalic r:id="rId26"/>
     </p:embeddedFont>
   </p:embeddedFontLst>
   <p:defaultTextStyle>
@@ -6543,10 +6544,10 @@
       </p:sp>
       <p:pic>
         <p:nvPicPr>
-          <p:cNvPr id="4" name="Imagen 3">
+          <p:cNvPr id="5" name="Imagen 4">
             <a:extLst>
               <a:ext uri="{FF2B5EF4-FFF2-40B4-BE49-F238E27FC236}">
-                <a16:creationId xmlns:a16="http://schemas.microsoft.com/office/drawing/2014/main" id="{7B09BE1A-097B-F76E-BB7A-8ED2B386136A}"/>
+                <a16:creationId xmlns:a16="http://schemas.microsoft.com/office/drawing/2014/main" id="{7613C33A-79E8-A134-0DEA-F9269A96E764}"/>
               </a:ext>
             </a:extLst>
           </p:cNvPr>
@@ -6563,8 +6564,8 @@
         </p:blipFill>
         <p:spPr>
           <a:xfrm>
-            <a:off x="0" y="662156"/>
-            <a:ext cx="9144000" cy="3962064"/>
+            <a:off x="0" y="590212"/>
+            <a:ext cx="9144000" cy="3963076"/>
           </a:xfrm>
           <a:prstGeom prst="rect">
             <a:avLst/>
@@ -6641,10 +6642,10 @@
       </p:sp>
       <p:pic>
         <p:nvPicPr>
-          <p:cNvPr id="3" name="Imagen 2">
+          <p:cNvPr id="7" name="Imagen 6">
             <a:extLst>
               <a:ext uri="{FF2B5EF4-FFF2-40B4-BE49-F238E27FC236}">
-                <a16:creationId xmlns:a16="http://schemas.microsoft.com/office/drawing/2014/main" id="{185FE8E3-F062-24B1-F9F5-AFDBDA9A9F14}"/>
+                <a16:creationId xmlns:a16="http://schemas.microsoft.com/office/drawing/2014/main" id="{39E5CD16-A91C-D685-089C-2CF71D8864A9}"/>
               </a:ext>
             </a:extLst>
           </p:cNvPr>
@@ -6661,8 +6662,8 @@
         </p:blipFill>
         <p:spPr>
           <a:xfrm>
-            <a:off x="0" y="1188692"/>
-            <a:ext cx="9144000" cy="2908992"/>
+            <a:off x="0" y="1086481"/>
+            <a:ext cx="9144000" cy="2970537"/>
           </a:xfrm>
           <a:prstGeom prst="rect">
             <a:avLst/>
@@ -6745,10 +6746,10 @@
       </p:sp>
       <p:pic>
         <p:nvPicPr>
-          <p:cNvPr id="3" name="Imagen 2">
+          <p:cNvPr id="4" name="Imagen 3">
             <a:extLst>
               <a:ext uri="{FF2B5EF4-FFF2-40B4-BE49-F238E27FC236}">
-                <a16:creationId xmlns:a16="http://schemas.microsoft.com/office/drawing/2014/main" id="{FCB4BE3E-4601-4746-BC1A-C4DC5319617E}"/>
+                <a16:creationId xmlns:a16="http://schemas.microsoft.com/office/drawing/2014/main" id="{053CF496-F093-EFF2-B535-D501771800A5}"/>
               </a:ext>
             </a:extLst>
           </p:cNvPr>
@@ -6765,8 +6766,8 @@
         </p:blipFill>
         <p:spPr>
           <a:xfrm>
-            <a:off x="0" y="471075"/>
-            <a:ext cx="9144000" cy="4344226"/>
+            <a:off x="0" y="970752"/>
+            <a:ext cx="9144000" cy="3344872"/>
           </a:xfrm>
           <a:prstGeom prst="rect">
             <a:avLst/>
@@ -6843,10 +6844,10 @@
       </p:sp>
       <p:pic>
         <p:nvPicPr>
-          <p:cNvPr id="5" name="Imagen 4">
+          <p:cNvPr id="4" name="Imagen 3">
             <a:extLst>
               <a:ext uri="{FF2B5EF4-FFF2-40B4-BE49-F238E27FC236}">
-                <a16:creationId xmlns:a16="http://schemas.microsoft.com/office/drawing/2014/main" id="{D66BF2FA-BD96-CF74-35CF-EE0C2E6543EF}"/>
+                <a16:creationId xmlns:a16="http://schemas.microsoft.com/office/drawing/2014/main" id="{389C03CD-3645-648F-91BF-7F74F9ECBB01}"/>
               </a:ext>
             </a:extLst>
           </p:cNvPr>
@@ -6863,8 +6864,8 @@
         </p:blipFill>
         <p:spPr>
           <a:xfrm>
-            <a:off x="-6725" y="1037772"/>
-            <a:ext cx="9144000" cy="3210831"/>
+            <a:off x="0" y="1077449"/>
+            <a:ext cx="9144000" cy="2988601"/>
           </a:xfrm>
           <a:prstGeom prst="rect">
             <a:avLst/>
@@ -6941,10 +6942,10 @@
       </p:sp>
       <p:pic>
         <p:nvPicPr>
-          <p:cNvPr id="3" name="Imagen 2">
+          <p:cNvPr id="4" name="Imagen 3">
             <a:extLst>
               <a:ext uri="{FF2B5EF4-FFF2-40B4-BE49-F238E27FC236}">
-                <a16:creationId xmlns:a16="http://schemas.microsoft.com/office/drawing/2014/main" id="{F37DDB57-3628-8CD0-863D-0A162C3655FB}"/>
+                <a16:creationId xmlns:a16="http://schemas.microsoft.com/office/drawing/2014/main" id="{DA862865-0C85-1EAF-3C25-50DFC148FD58}"/>
               </a:ext>
             </a:extLst>
           </p:cNvPr>
@@ -6961,8 +6962,8 @@
         </p:blipFill>
         <p:spPr>
           <a:xfrm>
-            <a:off x="0" y="462928"/>
-            <a:ext cx="9144000" cy="4360520"/>
+            <a:off x="0" y="470407"/>
+            <a:ext cx="9144000" cy="4345562"/>
           </a:xfrm>
           <a:prstGeom prst="rect">
             <a:avLst/>
@@ -6983,6 +6984,110 @@
 </file>
 
 <file path=ppt/slides/slide15.xml><?xml version="1.0" encoding="utf-8"?>
+<p:sld xmlns:a="http://schemas.openxmlformats.org/drawingml/2006/main" xmlns:r="http://schemas.openxmlformats.org/officeDocument/2006/relationships" xmlns:p="http://schemas.openxmlformats.org/presentationml/2006/main">
+  <p:cSld>
+    <p:spTree>
+      <p:nvGrpSpPr>
+        <p:cNvPr id="1" name="">
+          <a:extLst>
+            <a:ext uri="{FF2B5EF4-FFF2-40B4-BE49-F238E27FC236}">
+              <a16:creationId xmlns:a16="http://schemas.microsoft.com/office/drawing/2014/main" id="{F5C590E6-C482-6ED3-A65F-1D7028B134C1}"/>
+            </a:ext>
+          </a:extLst>
+        </p:cNvPr>
+        <p:cNvGrpSpPr/>
+        <p:nvPr/>
+      </p:nvGrpSpPr>
+      <p:grpSpPr>
+        <a:xfrm>
+          <a:off x="0" y="0"/>
+          <a:ext cx="0" cy="0"/>
+          <a:chOff x="0" y="0"/>
+          <a:chExt cx="0" cy="0"/>
+        </a:xfrm>
+      </p:grpSpPr>
+      <p:sp>
+        <p:nvSpPr>
+          <p:cNvPr id="6" name="CuadroTexto 5">
+            <a:extLst>
+              <a:ext uri="{FF2B5EF4-FFF2-40B4-BE49-F238E27FC236}">
+                <a16:creationId xmlns:a16="http://schemas.microsoft.com/office/drawing/2014/main" id="{D0C7E5EC-44E9-0606-186C-BB6D6A551476}"/>
+              </a:ext>
+            </a:extLst>
+          </p:cNvPr>
+          <p:cNvSpPr txBox="1"/>
+          <p:nvPr/>
+        </p:nvSpPr>
+        <p:spPr>
+          <a:xfrm>
+            <a:off x="1926166" y="88135"/>
+            <a:ext cx="5291667" cy="307777"/>
+          </a:xfrm>
+          <a:prstGeom prst="rect">
+            <a:avLst/>
+          </a:prstGeom>
+          <a:noFill/>
+        </p:spPr>
+        <p:txBody>
+          <a:bodyPr wrap="square" rtlCol="0">
+            <a:spAutoFit/>
+          </a:bodyPr>
+          <a:lstStyle/>
+          <a:p>
+            <a:pPr algn="ctr"/>
+            <a:r>
+              <a:rPr lang="es-MX" b="1" dirty="0">
+                <a:latin typeface="Montserrat" pitchFamily="2" charset="0"/>
+              </a:rPr>
+              <a:t>Temas de gobierno por radiodifusora</a:t>
+            </a:r>
+          </a:p>
+        </p:txBody>
+      </p:sp>
+      <p:pic>
+        <p:nvPicPr>
+          <p:cNvPr id="3" name="Imagen 2">
+            <a:extLst>
+              <a:ext uri="{FF2B5EF4-FFF2-40B4-BE49-F238E27FC236}">
+                <a16:creationId xmlns:a16="http://schemas.microsoft.com/office/drawing/2014/main" id="{3FCAC4C5-E9C8-3391-7A4C-1A326196388B}"/>
+              </a:ext>
+            </a:extLst>
+          </p:cNvPr>
+          <p:cNvPicPr>
+            <a:picLocks noChangeAspect="1"/>
+          </p:cNvPicPr>
+          <p:nvPr/>
+        </p:nvPicPr>
+        <p:blipFill>
+          <a:blip r:embed="rId2"/>
+          <a:stretch>
+            <a:fillRect/>
+          </a:stretch>
+        </p:blipFill>
+        <p:spPr>
+          <a:xfrm>
+            <a:off x="0" y="1050793"/>
+            <a:ext cx="9144000" cy="3286714"/>
+          </a:xfrm>
+          <a:prstGeom prst="rect">
+            <a:avLst/>
+          </a:prstGeom>
+        </p:spPr>
+      </p:pic>
+    </p:spTree>
+    <p:extLst>
+      <p:ext uri="{BB962C8B-B14F-4D97-AF65-F5344CB8AC3E}">
+        <p14:creationId xmlns:p14="http://schemas.microsoft.com/office/powerpoint/2010/main" val="4155701996"/>
+      </p:ext>
+    </p:extLst>
+  </p:cSld>
+  <p:clrMapOvr>
+    <a:masterClrMapping/>
+  </p:clrMapOvr>
+</p:sld>
+</file>
+
+<file path=ppt/slides/slide16.xml><?xml version="1.0" encoding="utf-8"?>
 <p:sld xmlns:a="http://schemas.openxmlformats.org/drawingml/2006/main" xmlns:r="http://schemas.openxmlformats.org/officeDocument/2006/relationships" xmlns:p="http://schemas.openxmlformats.org/presentationml/2006/main">
   <p:cSld>
     <p:spTree>
@@ -7039,10 +7144,10 @@
       </p:sp>
       <p:pic>
         <p:nvPicPr>
-          <p:cNvPr id="3" name="Imagen 2">
+          <p:cNvPr id="4" name="Imagen 3">
             <a:extLst>
               <a:ext uri="{FF2B5EF4-FFF2-40B4-BE49-F238E27FC236}">
-                <a16:creationId xmlns:a16="http://schemas.microsoft.com/office/drawing/2014/main" id="{6744A1E5-17C1-8380-3381-5C557A89261E}"/>
+                <a16:creationId xmlns:a16="http://schemas.microsoft.com/office/drawing/2014/main" id="{4C4A326B-17D4-57DE-F59C-F81AA5E08F2F}"/>
               </a:ext>
             </a:extLst>
           </p:cNvPr>
@@ -7059,8 +7164,8 @@
         </p:blipFill>
         <p:spPr>
           <a:xfrm>
-            <a:off x="0" y="709644"/>
-            <a:ext cx="9144000" cy="3724212"/>
+            <a:off x="0" y="1057743"/>
+            <a:ext cx="9144000" cy="3028013"/>
           </a:xfrm>
           <a:prstGeom prst="rect">
             <a:avLst/>
@@ -7080,7 +7185,7 @@
 </p:sld>
 </file>
 
-<file path=ppt/slides/slide16.xml><?xml version="1.0" encoding="utf-8"?>
+<file path=ppt/slides/slide17.xml><?xml version="1.0" encoding="utf-8"?>
 <p:sld xmlns:a="http://schemas.openxmlformats.org/drawingml/2006/main" xmlns:r="http://schemas.openxmlformats.org/officeDocument/2006/relationships" xmlns:p="http://schemas.openxmlformats.org/presentationml/2006/main">
   <p:cSld>
     <p:spTree>
